--- a/images/alliance-leadership/Brave Leadership and Breadership.pptx
+++ b/images/alliance-leadership/Brave Leadership and Breadership.pptx
@@ -206,7 +206,7 @@
           <a:p>
             <a:fld id="{9962AB11-1530-4979-8986-DB5079D81E9A}" type="datetimeFigureOut">
               <a:rPr lang="en-GB" smtClean="0"/>
-              <a:t>25/08/2025</a:t>
+              <a:t>14/07/2026</a:t>
             </a:fld>
             <a:endParaRPr lang="en-GB"/>
           </a:p>
@@ -815,7 +815,7 @@
           <a:p>
             <a:fld id="{5856F2AD-4EEB-49BC-BF6B-BBCD376DEAAB}" type="datetimeFigureOut">
               <a:rPr lang="en-GB" smtClean="0"/>
-              <a:t>25/08/2025</a:t>
+              <a:t>14/07/2026</a:t>
             </a:fld>
             <a:endParaRPr lang="en-GB"/>
           </a:p>
@@ -1015,7 +1015,7 @@
           <a:p>
             <a:fld id="{5856F2AD-4EEB-49BC-BF6B-BBCD376DEAAB}" type="datetimeFigureOut">
               <a:rPr lang="en-GB" smtClean="0"/>
-              <a:t>25/08/2025</a:t>
+              <a:t>14/07/2026</a:t>
             </a:fld>
             <a:endParaRPr lang="en-GB"/>
           </a:p>
@@ -1225,7 +1225,7 @@
           <a:p>
             <a:fld id="{5856F2AD-4EEB-49BC-BF6B-BBCD376DEAAB}" type="datetimeFigureOut">
               <a:rPr lang="en-GB" smtClean="0"/>
-              <a:t>25/08/2025</a:t>
+              <a:t>14/07/2026</a:t>
             </a:fld>
             <a:endParaRPr lang="en-GB"/>
           </a:p>
@@ -1425,7 +1425,7 @@
           <a:p>
             <a:fld id="{5856F2AD-4EEB-49BC-BF6B-BBCD376DEAAB}" type="datetimeFigureOut">
               <a:rPr lang="en-GB" smtClean="0"/>
-              <a:t>25/08/2025</a:t>
+              <a:t>14/07/2026</a:t>
             </a:fld>
             <a:endParaRPr lang="en-GB"/>
           </a:p>
@@ -1701,7 +1701,7 @@
           <a:p>
             <a:fld id="{5856F2AD-4EEB-49BC-BF6B-BBCD376DEAAB}" type="datetimeFigureOut">
               <a:rPr lang="en-GB" smtClean="0"/>
-              <a:t>25/08/2025</a:t>
+              <a:t>14/07/2026</a:t>
             </a:fld>
             <a:endParaRPr lang="en-GB"/>
           </a:p>
@@ -1969,7 +1969,7 @@
           <a:p>
             <a:fld id="{5856F2AD-4EEB-49BC-BF6B-BBCD376DEAAB}" type="datetimeFigureOut">
               <a:rPr lang="en-GB" smtClean="0"/>
-              <a:t>25/08/2025</a:t>
+              <a:t>14/07/2026</a:t>
             </a:fld>
             <a:endParaRPr lang="en-GB"/>
           </a:p>
@@ -2384,7 +2384,7 @@
           <a:p>
             <a:fld id="{5856F2AD-4EEB-49BC-BF6B-BBCD376DEAAB}" type="datetimeFigureOut">
               <a:rPr lang="en-GB" smtClean="0"/>
-              <a:t>25/08/2025</a:t>
+              <a:t>14/07/2026</a:t>
             </a:fld>
             <a:endParaRPr lang="en-GB"/>
           </a:p>
@@ -2526,7 +2526,7 @@
           <a:p>
             <a:fld id="{5856F2AD-4EEB-49BC-BF6B-BBCD376DEAAB}" type="datetimeFigureOut">
               <a:rPr lang="en-GB" smtClean="0"/>
-              <a:t>25/08/2025</a:t>
+              <a:t>14/07/2026</a:t>
             </a:fld>
             <a:endParaRPr lang="en-GB"/>
           </a:p>
@@ -2639,7 +2639,7 @@
           <a:p>
             <a:fld id="{5856F2AD-4EEB-49BC-BF6B-BBCD376DEAAB}" type="datetimeFigureOut">
               <a:rPr lang="en-GB" smtClean="0"/>
-              <a:t>25/08/2025</a:t>
+              <a:t>14/07/2026</a:t>
             </a:fld>
             <a:endParaRPr lang="en-GB"/>
           </a:p>
@@ -2952,7 +2952,7 @@
           <a:p>
             <a:fld id="{5856F2AD-4EEB-49BC-BF6B-BBCD376DEAAB}" type="datetimeFigureOut">
               <a:rPr lang="en-GB" smtClean="0"/>
-              <a:t>25/08/2025</a:t>
+              <a:t>14/07/2026</a:t>
             </a:fld>
             <a:endParaRPr lang="en-GB"/>
           </a:p>
@@ -3241,7 +3241,7 @@
           <a:p>
             <a:fld id="{5856F2AD-4EEB-49BC-BF6B-BBCD376DEAAB}" type="datetimeFigureOut">
               <a:rPr lang="en-GB" smtClean="0"/>
-              <a:t>25/08/2025</a:t>
+              <a:t>14/07/2026</a:t>
             </a:fld>
             <a:endParaRPr lang="en-GB"/>
           </a:p>
@@ -3484,7 +3484,7 @@
           <a:p>
             <a:fld id="{5856F2AD-4EEB-49BC-BF6B-BBCD376DEAAB}" type="datetimeFigureOut">
               <a:rPr lang="en-GB" smtClean="0"/>
-              <a:t>25/08/2025</a:t>
+              <a:t>14/07/2026</a:t>
             </a:fld>
             <a:endParaRPr lang="en-GB"/>
           </a:p>
@@ -4164,7 +4164,7 @@
         </p:nvSpPr>
         <p:spPr>
           <a:xfrm>
-            <a:off x="5717493" y="3755126"/>
+            <a:off x="5717493" y="3742064"/>
             <a:ext cx="1260000" cy="450000"/>
           </a:xfrm>
           <a:prstGeom prst="roundRect">
@@ -4317,7 +4317,7 @@
         <p:spPr>
           <a:xfrm>
             <a:off x="6347493" y="3121817"/>
-            <a:ext cx="0" cy="633309"/>
+            <a:ext cx="0" cy="620247"/>
           </a:xfrm>
           <a:prstGeom prst="line">
             <a:avLst/>
@@ -4506,169 +4506,6 @@
           </p:spPr>
         </p:pic>
       </p:grpSp>
-      <p:grpSp>
-        <p:nvGrpSpPr>
-          <p:cNvPr id="1045" name="Group 1044">
-            <a:extLst>
-              <a:ext uri="{FF2B5EF4-FFF2-40B4-BE49-F238E27FC236}">
-                <a16:creationId xmlns:a16="http://schemas.microsoft.com/office/drawing/2014/main" id="{8D37DB43-7CF8-5596-51EB-BCCF5BD46D7E}"/>
-              </a:ext>
-            </a:extLst>
-          </p:cNvPr>
-          <p:cNvGrpSpPr/>
-          <p:nvPr/>
-        </p:nvGrpSpPr>
-        <p:grpSpPr>
-          <a:xfrm>
-            <a:off x="2873027" y="2615160"/>
-            <a:ext cx="1762985" cy="540000"/>
-            <a:chOff x="2873027" y="2173531"/>
-            <a:chExt cx="1762985" cy="540000"/>
-          </a:xfrm>
-        </p:grpSpPr>
-        <p:sp>
-          <p:nvSpPr>
-            <p:cNvPr id="1099" name="Rectangle: Rounded Corners 1098">
-              <a:extLst>
-                <a:ext uri="{FF2B5EF4-FFF2-40B4-BE49-F238E27FC236}">
-                  <a16:creationId xmlns:a16="http://schemas.microsoft.com/office/drawing/2014/main" id="{34FCAC61-F5D9-B379-C798-C02018F1CD6A}"/>
-                </a:ext>
-              </a:extLst>
-            </p:cNvPr>
-            <p:cNvSpPr/>
-            <p:nvPr/>
-          </p:nvSpPr>
-          <p:spPr>
-            <a:xfrm>
-              <a:off x="3376012" y="2226656"/>
-              <a:ext cx="1260000" cy="450000"/>
-            </a:xfrm>
-            <a:prstGeom prst="roundRect">
-              <a:avLst/>
-            </a:prstGeom>
-            <a:solidFill>
-              <a:schemeClr val="bg1"/>
-            </a:solidFill>
-            <a:ln>
-              <a:noFill/>
-            </a:ln>
-          </p:spPr>
-          <p:style>
-            <a:lnRef idx="2">
-              <a:schemeClr val="accent1">
-                <a:shade val="15000"/>
-              </a:schemeClr>
-            </a:lnRef>
-            <a:fillRef idx="1">
-              <a:schemeClr val="accent1"/>
-            </a:fillRef>
-            <a:effectRef idx="0">
-              <a:schemeClr val="accent1"/>
-            </a:effectRef>
-            <a:fontRef idx="minor">
-              <a:schemeClr val="lt1"/>
-            </a:fontRef>
-          </p:style>
-          <p:txBody>
-            <a:bodyPr rtlCol="0" anchor="ctr"/>
-            <a:lstStyle/>
-            <a:p>
-              <a:r>
-                <a:rPr lang="en-GB" sz="900" dirty="0">
-                  <a:solidFill>
-                    <a:schemeClr val="tx1"/>
-                  </a:solidFill>
-                </a:rPr>
-                <a:t> Kara </a:t>
-              </a:r>
-              <a:r>
-                <a:rPr lang="en-GB" sz="900" dirty="0" err="1">
-                  <a:solidFill>
-                    <a:schemeClr val="tx1"/>
-                  </a:solidFill>
-                </a:rPr>
-                <a:t>Mabonar</a:t>
-              </a:r>
-              <a:endParaRPr lang="en-GB" sz="900" dirty="0">
-                <a:solidFill>
-                  <a:schemeClr val="tx1"/>
-                </a:solidFill>
-              </a:endParaRPr>
-            </a:p>
-            <a:p>
-              <a:r>
-                <a:rPr lang="en-GB" sz="900" dirty="0">
-                  <a:solidFill>
-                    <a:schemeClr val="tx1"/>
-                  </a:solidFill>
-                </a:rPr>
-                <a:t> </a:t>
-              </a:r>
-              <a:r>
-                <a:rPr lang="en-GB" sz="800" dirty="0">
-                  <a:solidFill>
-                    <a:schemeClr val="tx1"/>
-                  </a:solidFill>
-                </a:rPr>
-                <a:t>Infrastructure Director</a:t>
-              </a:r>
-            </a:p>
-          </p:txBody>
-        </p:sp>
-        <p:pic>
-          <p:nvPicPr>
-            <p:cNvPr id="1100" name="Picture 2">
-              <a:extLst>
-                <a:ext uri="{FF2B5EF4-FFF2-40B4-BE49-F238E27FC236}">
-                  <a16:creationId xmlns:a16="http://schemas.microsoft.com/office/drawing/2014/main" id="{8DE6D8F5-6999-DDE8-15B9-CD508A25A868}"/>
-                </a:ext>
-              </a:extLst>
-            </p:cNvPr>
-            <p:cNvPicPr>
-              <a:picLocks noChangeAspect="1" noChangeArrowheads="1"/>
-            </p:cNvPicPr>
-            <p:nvPr/>
-          </p:nvPicPr>
-          <p:blipFill>
-            <a:blip r:embed="rId6" cstate="screen">
-              <a:extLst>
-                <a:ext uri="{28A0092B-C50C-407E-A947-70E740481C1C}">
-                  <a14:useLocalDpi xmlns:a14="http://schemas.microsoft.com/office/drawing/2010/main" val="0"/>
-                </a:ext>
-              </a:extLst>
-            </a:blip>
-            <a:srcRect/>
-            <a:stretch/>
-          </p:blipFill>
-          <p:spPr bwMode="auto">
-            <a:xfrm>
-              <a:off x="2873027" y="2173531"/>
-              <a:ext cx="540000" cy="540000"/>
-            </a:xfrm>
-            <a:prstGeom prst="rect">
-              <a:avLst/>
-            </a:prstGeom>
-            <a:noFill/>
-            <a:ln w="57150">
-              <a:solidFill>
-                <a:srgbClr val="00B0F0"/>
-              </a:solidFill>
-            </a:ln>
-            <a:effectLst>
-              <a:softEdge rad="25400"/>
-            </a:effectLst>
-            <a:extLst>
-              <a:ext uri="{909E8E84-426E-40DD-AFC4-6F175D3DCCD1}">
-                <a14:hiddenFill xmlns:a14="http://schemas.microsoft.com/office/drawing/2010/main">
-                  <a:solidFill>
-                    <a:srgbClr val="FFFFFF"/>
-                  </a:solidFill>
-                </a14:hiddenFill>
-              </a:ext>
-            </a:extLst>
-          </p:spPr>
-        </p:pic>
-      </p:grpSp>
       <p:cxnSp>
         <p:nvCxnSpPr>
           <p:cNvPr id="1146" name="Connector: Elbow 1145">
@@ -4681,14 +4518,14 @@
           <p:cNvCxnSpPr>
             <a:cxnSpLocks/>
             <a:stCxn id="34" idx="3"/>
-            <a:endCxn id="16" idx="1"/>
+            <a:endCxn id="30" idx="1"/>
           </p:cNvCxnSpPr>
           <p:nvPr/>
         </p:nvCxnSpPr>
         <p:spPr>
           <a:xfrm flipV="1">
-            <a:off x="9303324" y="2812448"/>
-            <a:ext cx="556932" cy="624677"/>
+            <a:off x="9303324" y="2921617"/>
+            <a:ext cx="532618" cy="515508"/>
           </a:xfrm>
           <a:prstGeom prst="bentConnector3">
             <a:avLst>
@@ -4835,7 +4672,7 @@
             <p:nvPr/>
           </p:nvPicPr>
           <p:blipFill>
-            <a:blip r:embed="rId7" cstate="screen">
+            <a:blip r:embed="rId6" cstate="screen">
               <a:extLst>
                 <a:ext uri="{28A0092B-C50C-407E-A947-70E740481C1C}">
                   <a14:useLocalDpi xmlns:a14="http://schemas.microsoft.com/office/drawing/2010/main" val="0"/>
@@ -5003,7 +4840,7 @@
             <p:nvPr/>
           </p:nvPicPr>
           <p:blipFill>
-            <a:blip r:embed="rId8" cstate="screen">
+            <a:blip r:embed="rId7" cstate="screen">
               <a:extLst>
                 <a:ext uri="{28A0092B-C50C-407E-A947-70E740481C1C}">
                   <a14:useLocalDpi xmlns:a14="http://schemas.microsoft.com/office/drawing/2010/main" val="0"/>
@@ -5171,7 +5008,7 @@
             <p:nvPr/>
           </p:nvPicPr>
           <p:blipFill>
-            <a:blip r:embed="rId9" cstate="screen">
+            <a:blip r:embed="rId8" cstate="screen">
               <a:extLst>
                 <a:ext uri="{28A0092B-C50C-407E-A947-70E740481C1C}">
                   <a14:useLocalDpi xmlns:a14="http://schemas.microsoft.com/office/drawing/2010/main" val="0"/>
@@ -5321,8 +5158,8 @@
         </p:nvCxnSpPr>
         <p:spPr>
           <a:xfrm flipV="1">
-            <a:off x="9303324" y="3881056"/>
-            <a:ext cx="562846" cy="789069"/>
+            <a:off x="9303324" y="3903494"/>
+            <a:ext cx="532180" cy="766631"/>
           </a:xfrm>
           <a:prstGeom prst="bentConnector3">
             <a:avLst/>
@@ -5359,9 +5196,9 @@
           <p:nvPr/>
         </p:nvCxnSpPr>
         <p:spPr>
-          <a:xfrm flipV="1">
-            <a:off x="9303324" y="4662000"/>
-            <a:ext cx="562846" cy="8125"/>
+          <a:xfrm>
+            <a:off x="9303324" y="4670125"/>
+            <a:ext cx="532181" cy="215246"/>
           </a:xfrm>
           <a:prstGeom prst="bentConnector3">
             <a:avLst/>
@@ -5399,13 +5236,13 @@
           <p:nvPr/>
         </p:nvCxnSpPr>
         <p:spPr>
-          <a:xfrm rot="10800000" flipV="1">
-            <a:off x="9866170" y="4662000"/>
-            <a:ext cx="12700" cy="822038"/>
+          <a:xfrm rot="10800000" flipH="1" flipV="1">
+            <a:off x="9835504" y="4885371"/>
+            <a:ext cx="6351" cy="981876"/>
           </a:xfrm>
           <a:prstGeom prst="bentConnector3">
             <a:avLst>
-              <a:gd name="adj1" fmla="val 2325843"/>
+              <a:gd name="adj1" fmla="val -4319320"/>
             </a:avLst>
           </a:prstGeom>
         </p:spPr>
@@ -5880,8 +5717,8 @@
         </p:nvCxnSpPr>
         <p:spPr>
           <a:xfrm>
-            <a:off x="6977493" y="3980126"/>
-            <a:ext cx="562846" cy="681874"/>
+            <a:off x="6977493" y="3967064"/>
+            <a:ext cx="562846" cy="694936"/>
           </a:xfrm>
           <a:prstGeom prst="bentConnector3">
             <a:avLst/>
@@ -5921,7 +5758,7 @@
         <p:spPr>
           <a:xfrm flipV="1">
             <a:off x="6977493" y="3429000"/>
-            <a:ext cx="562846" cy="551126"/>
+            <a:ext cx="562846" cy="538064"/>
           </a:xfrm>
           <a:prstGeom prst="bentConnector3">
             <a:avLst/>
@@ -6138,7 +5975,7 @@
             <p:nvPr/>
           </p:nvPicPr>
           <p:blipFill>
-            <a:blip r:embed="rId10" cstate="screen">
+            <a:blip r:embed="rId9" cstate="screen">
               <a:extLst>
                 <a:ext uri="{28A0092B-C50C-407E-A947-70E740481C1C}">
                   <a14:useLocalDpi xmlns:a14="http://schemas.microsoft.com/office/drawing/2010/main" val="0"/>
@@ -6192,7 +6029,7 @@
           <p:nvPr/>
         </p:nvPicPr>
         <p:blipFill>
-          <a:blip r:embed="rId11" cstate="screen">
+          <a:blip r:embed="rId10" cstate="screen">
             <a:extLst>
               <a:ext uri="{28A0092B-C50C-407E-A947-70E740481C1C}">
                 <a14:useLocalDpi xmlns:a14="http://schemas.microsoft.com/office/drawing/2010/main" val="0"/>
@@ -6313,7 +6150,7 @@
           <p:nvPr/>
         </p:nvPicPr>
         <p:blipFill>
-          <a:blip r:embed="rId12" cstate="screen">
+          <a:blip r:embed="rId11" cstate="screen">
             <a:extLst>
               <a:ext uri="{28A0092B-C50C-407E-A947-70E740481C1C}">
                 <a14:useLocalDpi xmlns:a14="http://schemas.microsoft.com/office/drawing/2010/main" val="0"/>
@@ -6454,7 +6291,7 @@
             <p:nvPr/>
           </p:nvPicPr>
           <p:blipFill>
-            <a:blip r:embed="rId13" cstate="screen">
+            <a:blip r:embed="rId12" cstate="screen">
               <a:extLst>
                 <a:ext uri="{28A0092B-C50C-407E-A947-70E740481C1C}">
                   <a14:useLocalDpi xmlns:a14="http://schemas.microsoft.com/office/drawing/2010/main" val="0"/>
@@ -6493,12 +6330,149 @@
           </p:spPr>
         </p:pic>
       </p:grpSp>
+      <p:sp>
+        <p:nvSpPr>
+          <p:cNvPr id="34" name="Rectangle: Rounded Corners 33">
+            <a:extLst>
+              <a:ext uri="{FF2B5EF4-FFF2-40B4-BE49-F238E27FC236}">
+                <a16:creationId xmlns:a16="http://schemas.microsoft.com/office/drawing/2014/main" id="{9BA7BE8B-7308-5E75-CDAB-13DC10DE0C3D}"/>
+              </a:ext>
+            </a:extLst>
+          </p:cNvPr>
+          <p:cNvSpPr/>
+          <p:nvPr/>
+        </p:nvSpPr>
+        <p:spPr>
+          <a:xfrm>
+            <a:off x="8043324" y="3212125"/>
+            <a:ext cx="1260000" cy="450000"/>
+          </a:xfrm>
+          <a:prstGeom prst="roundRect">
+            <a:avLst/>
+          </a:prstGeom>
+          <a:solidFill>
+            <a:schemeClr val="bg1"/>
+          </a:solidFill>
+          <a:ln>
+            <a:noFill/>
+          </a:ln>
+        </p:spPr>
+        <p:style>
+          <a:lnRef idx="2">
+            <a:schemeClr val="accent1">
+              <a:shade val="15000"/>
+            </a:schemeClr>
+          </a:lnRef>
+          <a:fillRef idx="1">
+            <a:schemeClr val="accent1"/>
+          </a:fillRef>
+          <a:effectRef idx="0">
+            <a:schemeClr val="accent1"/>
+          </a:effectRef>
+          <a:fontRef idx="minor">
+            <a:schemeClr val="lt1"/>
+          </a:fontRef>
+        </p:style>
+        <p:txBody>
+          <a:bodyPr rtlCol="0" anchor="ctr"/>
+          <a:lstStyle/>
+          <a:p>
+            <a:r>
+              <a:rPr lang="en-GB" sz="1000" dirty="0">
+                <a:solidFill>
+                  <a:schemeClr val="tx1"/>
+                </a:solidFill>
+              </a:rPr>
+              <a:t> </a:t>
+            </a:r>
+            <a:r>
+              <a:rPr lang="en-GB" sz="1000" dirty="0" err="1">
+                <a:solidFill>
+                  <a:schemeClr val="tx1"/>
+                </a:solidFill>
+              </a:rPr>
+              <a:t>Combus</a:t>
+            </a:r>
+            <a:r>
+              <a:rPr lang="en-GB" sz="1000" dirty="0">
+                <a:solidFill>
+                  <a:schemeClr val="tx1"/>
+                </a:solidFill>
+              </a:rPr>
+              <a:t> Tyan</a:t>
+            </a:r>
+          </a:p>
+          <a:p>
+            <a:r>
+              <a:rPr lang="en-GB" sz="900" dirty="0">
+                <a:solidFill>
+                  <a:schemeClr val="tx1"/>
+                </a:solidFill>
+              </a:rPr>
+              <a:t> Classiness Director</a:t>
+            </a:r>
+          </a:p>
+        </p:txBody>
+      </p:sp>
+      <p:pic>
+        <p:nvPicPr>
+          <p:cNvPr id="35" name="Picture 2">
+            <a:extLst>
+              <a:ext uri="{FF2B5EF4-FFF2-40B4-BE49-F238E27FC236}">
+                <a16:creationId xmlns:a16="http://schemas.microsoft.com/office/drawing/2014/main" id="{A33D995E-F68D-801A-7469-951294696851}"/>
+              </a:ext>
+            </a:extLst>
+          </p:cNvPr>
+          <p:cNvPicPr>
+            <a:picLocks noChangeAspect="1" noChangeArrowheads="1"/>
+          </p:cNvPicPr>
+          <p:nvPr/>
+        </p:nvPicPr>
+        <p:blipFill>
+          <a:blip r:embed="rId13" cstate="screen">
+            <a:extLst>
+              <a:ext uri="{28A0092B-C50C-407E-A947-70E740481C1C}">
+                <a14:useLocalDpi xmlns:a14="http://schemas.microsoft.com/office/drawing/2010/main" val="0"/>
+              </a:ext>
+            </a:extLst>
+          </a:blip>
+          <a:srcRect/>
+          <a:stretch/>
+        </p:blipFill>
+        <p:spPr bwMode="auto">
+          <a:xfrm>
+            <a:off x="7540339" y="3159000"/>
+            <a:ext cx="540000" cy="540000"/>
+          </a:xfrm>
+          <a:prstGeom prst="rect">
+            <a:avLst/>
+          </a:prstGeom>
+          <a:noFill/>
+          <a:ln w="57150">
+            <a:solidFill>
+              <a:srgbClr val="00B0F0"/>
+            </a:solidFill>
+          </a:ln>
+          <a:effectLst>
+            <a:softEdge rad="25400"/>
+          </a:effectLst>
+          <a:extLst>
+            <a:ext uri="{909E8E84-426E-40DD-AFC4-6F175D3DCCD1}">
+              <a14:hiddenFill xmlns:a14="http://schemas.microsoft.com/office/drawing/2010/main">
+                <a:solidFill>
+                  <a:srgbClr val="FFFFFF"/>
+                </a:solidFill>
+              </a14:hiddenFill>
+            </a:ext>
+          </a:extLst>
+        </p:spPr>
+      </p:pic>
       <p:grpSp>
         <p:nvGrpSpPr>
-          <p:cNvPr id="51" name="Group 50">
-            <a:extLst>
-              <a:ext uri="{FF2B5EF4-FFF2-40B4-BE49-F238E27FC236}">
-                <a16:creationId xmlns:a16="http://schemas.microsoft.com/office/drawing/2014/main" id="{329C6828-53A2-2FEC-68A7-563568DC2645}"/>
+          <p:cNvPr id="1050" name="Group 1049">
+            <a:extLst>
+              <a:ext uri="{FF2B5EF4-FFF2-40B4-BE49-F238E27FC236}">
+                <a16:creationId xmlns:a16="http://schemas.microsoft.com/office/drawing/2014/main" id="{7531850E-086B-0D9C-6E2E-915D7D8D9736}"/>
               </a:ext>
             </a:extLst>
           </p:cNvPr>
@@ -6507,164 +6481,9 @@
         </p:nvGrpSpPr>
         <p:grpSpPr>
           <a:xfrm>
-            <a:off x="7540339" y="3159000"/>
+            <a:off x="9835505" y="4615371"/>
             <a:ext cx="1762985" cy="540000"/>
-            <a:chOff x="7540339" y="2630571"/>
-            <a:chExt cx="1762985" cy="540000"/>
-          </a:xfrm>
-        </p:grpSpPr>
-        <p:sp>
-          <p:nvSpPr>
-            <p:cNvPr id="34" name="Rectangle: Rounded Corners 33">
-              <a:extLst>
-                <a:ext uri="{FF2B5EF4-FFF2-40B4-BE49-F238E27FC236}">
-                  <a16:creationId xmlns:a16="http://schemas.microsoft.com/office/drawing/2014/main" id="{9BA7BE8B-7308-5E75-CDAB-13DC10DE0C3D}"/>
-                </a:ext>
-              </a:extLst>
-            </p:cNvPr>
-            <p:cNvSpPr/>
-            <p:nvPr/>
-          </p:nvSpPr>
-          <p:spPr>
-            <a:xfrm>
-              <a:off x="8043324" y="2683696"/>
-              <a:ext cx="1260000" cy="450000"/>
-            </a:xfrm>
-            <a:prstGeom prst="roundRect">
-              <a:avLst/>
-            </a:prstGeom>
-            <a:solidFill>
-              <a:schemeClr val="bg1"/>
-            </a:solidFill>
-            <a:ln>
-              <a:noFill/>
-            </a:ln>
-          </p:spPr>
-          <p:style>
-            <a:lnRef idx="2">
-              <a:schemeClr val="accent1">
-                <a:shade val="15000"/>
-              </a:schemeClr>
-            </a:lnRef>
-            <a:fillRef idx="1">
-              <a:schemeClr val="accent1"/>
-            </a:fillRef>
-            <a:effectRef idx="0">
-              <a:schemeClr val="accent1"/>
-            </a:effectRef>
-            <a:fontRef idx="minor">
-              <a:schemeClr val="lt1"/>
-            </a:fontRef>
-          </p:style>
-          <p:txBody>
-            <a:bodyPr rtlCol="0" anchor="ctr"/>
-            <a:lstStyle/>
-            <a:p>
-              <a:r>
-                <a:rPr lang="en-GB" sz="1000" dirty="0">
-                  <a:solidFill>
-                    <a:schemeClr val="tx1"/>
-                  </a:solidFill>
-                </a:rPr>
-                <a:t> Jesse </a:t>
-              </a:r>
-              <a:r>
-                <a:rPr lang="en-GB" sz="1000" dirty="0" err="1">
-                  <a:solidFill>
-                    <a:schemeClr val="tx1"/>
-                  </a:solidFill>
-                </a:rPr>
-                <a:t>Takona</a:t>
-              </a:r>
-              <a:endParaRPr lang="en-GB" sz="1000" dirty="0">
-                <a:solidFill>
-                  <a:schemeClr val="tx1"/>
-                </a:solidFill>
-              </a:endParaRPr>
-            </a:p>
-            <a:p>
-              <a:r>
-                <a:rPr lang="en-GB" sz="900" dirty="0">
-                  <a:solidFill>
-                    <a:schemeClr val="tx1"/>
-                  </a:solidFill>
-                </a:rPr>
-                <a:t> Classiness Director</a:t>
-              </a:r>
-            </a:p>
-          </p:txBody>
-        </p:sp>
-        <p:pic>
-          <p:nvPicPr>
-            <p:cNvPr id="35" name="Picture 2">
-              <a:extLst>
-                <a:ext uri="{FF2B5EF4-FFF2-40B4-BE49-F238E27FC236}">
-                  <a16:creationId xmlns:a16="http://schemas.microsoft.com/office/drawing/2014/main" id="{A33D995E-F68D-801A-7469-951294696851}"/>
-                </a:ext>
-              </a:extLst>
-            </p:cNvPr>
-            <p:cNvPicPr>
-              <a:picLocks noChangeAspect="1" noChangeArrowheads="1"/>
-            </p:cNvPicPr>
-            <p:nvPr/>
-          </p:nvPicPr>
-          <p:blipFill>
-            <a:blip r:embed="rId14" cstate="screen">
-              <a:extLst>
-                <a:ext uri="{28A0092B-C50C-407E-A947-70E740481C1C}">
-                  <a14:useLocalDpi xmlns:a14="http://schemas.microsoft.com/office/drawing/2010/main" val="0"/>
-                </a:ext>
-              </a:extLst>
-            </a:blip>
-            <a:srcRect/>
-            <a:stretch/>
-          </p:blipFill>
-          <p:spPr bwMode="auto">
-            <a:xfrm>
-              <a:off x="7540339" y="2630571"/>
-              <a:ext cx="540000" cy="540000"/>
-            </a:xfrm>
-            <a:prstGeom prst="rect">
-              <a:avLst/>
-            </a:prstGeom>
-            <a:noFill/>
-            <a:ln w="57150">
-              <a:solidFill>
-                <a:srgbClr val="00B0F0"/>
-              </a:solidFill>
-            </a:ln>
-            <a:effectLst>
-              <a:softEdge rad="25400"/>
-            </a:effectLst>
-            <a:extLst>
-              <a:ext uri="{909E8E84-426E-40DD-AFC4-6F175D3DCCD1}">
-                <a14:hiddenFill xmlns:a14="http://schemas.microsoft.com/office/drawing/2010/main">
-                  <a:solidFill>
-                    <a:srgbClr val="FFFFFF"/>
-                  </a:solidFill>
-                </a14:hiddenFill>
-              </a:ext>
-            </a:extLst>
-          </p:spPr>
-        </p:pic>
-      </p:grpSp>
-      <p:grpSp>
-        <p:nvGrpSpPr>
-          <p:cNvPr id="1050" name="Group 1049">
-            <a:extLst>
-              <a:ext uri="{FF2B5EF4-FFF2-40B4-BE49-F238E27FC236}">
-                <a16:creationId xmlns:a16="http://schemas.microsoft.com/office/drawing/2014/main" id="{7531850E-086B-0D9C-6E2E-915D7D8D9736}"/>
-              </a:ext>
-            </a:extLst>
-          </p:cNvPr>
-          <p:cNvGrpSpPr/>
-          <p:nvPr/>
-        </p:nvGrpSpPr>
-        <p:grpSpPr>
-          <a:xfrm>
-            <a:off x="9866170" y="4392000"/>
-            <a:ext cx="1762985" cy="540000"/>
-            <a:chOff x="9866170" y="5008500"/>
+            <a:chOff x="9835505" y="5300225"/>
             <a:chExt cx="1762985" cy="540000"/>
           </a:xfrm>
         </p:grpSpPr>
@@ -6682,7 +6501,7 @@
           </p:nvSpPr>
           <p:spPr>
             <a:xfrm>
-              <a:off x="10369155" y="5061625"/>
+              <a:off x="10338490" y="5353350"/>
               <a:ext cx="1260000" cy="450000"/>
             </a:xfrm>
             <a:prstGeom prst="roundRect">
@@ -6777,7 +6596,7 @@
             <p:nvPr/>
           </p:nvPicPr>
           <p:blipFill>
-            <a:blip r:embed="rId15" cstate="screen">
+            <a:blip r:embed="rId14" cstate="screen">
               <a:extLst>
                 <a:ext uri="{28A0092B-C50C-407E-A947-70E740481C1C}">
                   <a14:useLocalDpi xmlns:a14="http://schemas.microsoft.com/office/drawing/2010/main" val="0"/>
@@ -6789,7 +6608,7 @@
           </p:blipFill>
           <p:spPr bwMode="auto">
             <a:xfrm>
-              <a:off x="9866170" y="5008500"/>
+              <a:off x="9835505" y="5300225"/>
               <a:ext cx="540000" cy="540000"/>
             </a:xfrm>
             <a:prstGeom prst="rect">
@@ -6830,9 +6649,9 @@
         </p:nvGrpSpPr>
         <p:grpSpPr>
           <a:xfrm>
-            <a:off x="9866170" y="3611056"/>
+            <a:off x="9835504" y="3633494"/>
             <a:ext cx="1762985" cy="540000"/>
-            <a:chOff x="9866170" y="4083750"/>
+            <a:chOff x="9835504" y="4316515"/>
             <a:chExt cx="1762985" cy="540000"/>
           </a:xfrm>
         </p:grpSpPr>
@@ -6850,7 +6669,7 @@
           </p:nvSpPr>
           <p:spPr>
             <a:xfrm>
-              <a:off x="10369155" y="4136875"/>
+              <a:off x="10338489" y="4369640"/>
               <a:ext cx="1260000" cy="450000"/>
             </a:xfrm>
             <a:prstGeom prst="roundRect">
@@ -6940,7 +6759,7 @@
             <p:nvPr/>
           </p:nvPicPr>
           <p:blipFill>
-            <a:blip r:embed="rId16" cstate="screen">
+            <a:blip r:embed="rId15" cstate="screen">
               <a:extLst>
                 <a:ext uri="{28A0092B-C50C-407E-A947-70E740481C1C}">
                   <a14:useLocalDpi xmlns:a14="http://schemas.microsoft.com/office/drawing/2010/main" val="0"/>
@@ -6952,7 +6771,7 @@
           </p:blipFill>
           <p:spPr bwMode="auto">
             <a:xfrm>
-              <a:off x="9866170" y="4083750"/>
+              <a:off x="9835504" y="4316515"/>
               <a:ext cx="540000" cy="540000"/>
             </a:xfrm>
             <a:prstGeom prst="rect">
@@ -6993,9 +6812,9 @@
         </p:nvGrpSpPr>
         <p:grpSpPr>
           <a:xfrm>
-            <a:off x="9866170" y="5214038"/>
+            <a:off x="9841856" y="5597247"/>
             <a:ext cx="1762985" cy="540000"/>
-            <a:chOff x="9866170" y="5933250"/>
+            <a:chOff x="9841856" y="6316459"/>
             <a:chExt cx="1762985" cy="540000"/>
           </a:xfrm>
         </p:grpSpPr>
@@ -7013,7 +6832,7 @@
           </p:nvSpPr>
           <p:spPr>
             <a:xfrm>
-              <a:off x="10369155" y="5986375"/>
+              <a:off x="10344841" y="6369584"/>
               <a:ext cx="1260000" cy="450000"/>
             </a:xfrm>
             <a:prstGeom prst="roundRect">
@@ -7103,7 +6922,7 @@
             <p:nvPr/>
           </p:nvPicPr>
           <p:blipFill>
-            <a:blip r:embed="rId17" cstate="screen">
+            <a:blip r:embed="rId16" cstate="screen">
               <a:extLst>
                 <a:ext uri="{28A0092B-C50C-407E-A947-70E740481C1C}">
                   <a14:useLocalDpi xmlns:a14="http://schemas.microsoft.com/office/drawing/2010/main" val="0"/>
@@ -7115,7 +6934,7 @@
           </p:blipFill>
           <p:spPr bwMode="auto">
             <a:xfrm>
-              <a:off x="9866170" y="5933250"/>
+              <a:off x="9841856" y="6316459"/>
               <a:ext cx="540000" cy="540000"/>
             </a:xfrm>
             <a:prstGeom prst="rect">
@@ -7250,7 +7069,7 @@
             <p:nvPr/>
           </p:nvPicPr>
           <p:blipFill>
-            <a:blip r:embed="rId18" cstate="screen">
+            <a:blip r:embed="rId17" cstate="screen">
               <a:extLst>
                 <a:ext uri="{28A0092B-C50C-407E-A947-70E740481C1C}">
                   <a14:useLocalDpi xmlns:a14="http://schemas.microsoft.com/office/drawing/2010/main" val="0"/>
@@ -7442,7 +7261,7 @@
             <p:nvPr/>
           </p:nvPicPr>
           <p:blipFill>
-            <a:blip r:embed="rId19" cstate="screen">
+            <a:blip r:embed="rId18" cstate="screen">
               <a:extLst>
                 <a:ext uri="{28A0092B-C50C-407E-A947-70E740481C1C}">
                   <a14:useLocalDpi xmlns:a14="http://schemas.microsoft.com/office/drawing/2010/main" val="0"/>
@@ -7584,7 +7403,7 @@
             <p:nvPr/>
           </p:nvPicPr>
           <p:blipFill>
-            <a:blip r:embed="rId20" cstate="screen">
+            <a:blip r:embed="rId19" cstate="screen">
               <a:extLst>
                 <a:ext uri="{28A0092B-C50C-407E-A947-70E740481C1C}">
                   <a14:useLocalDpi xmlns:a14="http://schemas.microsoft.com/office/drawing/2010/main" val="0"/>
@@ -7750,7 +7569,7 @@
             <p:nvPr/>
           </p:nvPicPr>
           <p:blipFill>
-            <a:blip r:embed="rId21" cstate="screen">
+            <a:blip r:embed="rId20" cstate="screen">
               <a:extLst>
                 <a:ext uri="{28A0092B-C50C-407E-A947-70E740481C1C}">
                   <a14:useLocalDpi xmlns:a14="http://schemas.microsoft.com/office/drawing/2010/main" val="0"/>
@@ -7920,7 +7739,7 @@
             <p:nvPr/>
           </p:nvPicPr>
           <p:blipFill>
-            <a:blip r:embed="rId22" cstate="screen">
+            <a:blip r:embed="rId21" cstate="screen">
               <a:extLst>
                 <a:ext uri="{28A0092B-C50C-407E-A947-70E740481C1C}">
                   <a14:useLocalDpi xmlns:a14="http://schemas.microsoft.com/office/drawing/2010/main" val="0"/>
@@ -8084,7 +7903,7 @@
           <p:nvPr/>
         </p:nvPicPr>
         <p:blipFill>
-          <a:blip r:embed="rId23" cstate="screen">
+          <a:blip r:embed="rId22" cstate="screen">
             <a:extLst>
               <a:ext uri="{28A0092B-C50C-407E-A947-70E740481C1C}">
                 <a14:useLocalDpi xmlns:a14="http://schemas.microsoft.com/office/drawing/2010/main" val="0"/>
@@ -8226,7 +8045,7 @@
           <p:nvPr/>
         </p:nvPicPr>
         <p:blipFill>
-          <a:blip r:embed="rId8" cstate="screen">
+          <a:blip r:embed="rId7" cstate="screen">
             <a:extLst>
               <a:ext uri="{28A0092B-C50C-407E-A947-70E740481C1C}">
                 <a14:useLocalDpi xmlns:a14="http://schemas.microsoft.com/office/drawing/2010/main" val="0"/>
@@ -8266,10 +8085,10 @@
       </p:pic>
       <p:grpSp>
         <p:nvGrpSpPr>
-          <p:cNvPr id="1048" name="Group 1047">
-            <a:extLst>
-              <a:ext uri="{FF2B5EF4-FFF2-40B4-BE49-F238E27FC236}">
-                <a16:creationId xmlns:a16="http://schemas.microsoft.com/office/drawing/2014/main" id="{B5797DD8-CF1C-CC4D-1354-8292D5A71466}"/>
+          <p:cNvPr id="37" name="Group 36">
+            <a:extLst>
+              <a:ext uri="{FF2B5EF4-FFF2-40B4-BE49-F238E27FC236}">
+                <a16:creationId xmlns:a16="http://schemas.microsoft.com/office/drawing/2014/main" id="{B61360A9-9E85-79B5-2BC8-B90710285D38}"/>
               </a:ext>
             </a:extLst>
           </p:cNvPr>
@@ -8278,9 +8097,9 @@
         </p:nvGrpSpPr>
         <p:grpSpPr>
           <a:xfrm>
-            <a:off x="9860256" y="2542448"/>
+            <a:off x="9835505" y="1669740"/>
             <a:ext cx="1768899" cy="540000"/>
-            <a:chOff x="9860256" y="2102857"/>
+            <a:chOff x="9835505" y="1928781"/>
             <a:chExt cx="1768899" cy="540000"/>
           </a:xfrm>
         </p:grpSpPr>
@@ -8298,7 +8117,7 @@
           </p:nvSpPr>
           <p:spPr>
             <a:xfrm>
-              <a:off x="10369155" y="2145076"/>
+              <a:off x="10344404" y="1971000"/>
               <a:ext cx="1260000" cy="450000"/>
             </a:xfrm>
             <a:prstGeom prst="roundRect">
@@ -8363,15 +8182,7 @@
                     <a:schemeClr val="tx1"/>
                   </a:solidFill>
                 </a:rPr>
-                <a:t> </a:t>
-              </a:r>
-              <a:r>
-                <a:rPr lang="en-GB" sz="700" dirty="0">
-                  <a:solidFill>
-                    <a:schemeClr val="tx1"/>
-                  </a:solidFill>
-                </a:rPr>
-                <a:t>2IC Classiness and Diplo</a:t>
+                <a:t> Diplo 2IC</a:t>
               </a:r>
               <a:endParaRPr lang="en-GB" sz="600" dirty="0">
                 <a:solidFill>
@@ -8396,7 +8207,7 @@
             <p:nvPr/>
           </p:nvPicPr>
           <p:blipFill>
-            <a:blip r:embed="rId24" cstate="screen">
+            <a:blip r:embed="rId23" cstate="screen">
               <a:extLst>
                 <a:ext uri="{28A0092B-C50C-407E-A947-70E740481C1C}">
                   <a14:useLocalDpi xmlns:a14="http://schemas.microsoft.com/office/drawing/2010/main" val="0"/>
@@ -8408,7 +8219,7 @@
           </p:blipFill>
           <p:spPr bwMode="auto">
             <a:xfrm>
-              <a:off x="9860256" y="2102857"/>
+              <a:off x="9835505" y="1928781"/>
               <a:ext cx="540000" cy="540000"/>
             </a:xfrm>
             <a:prstGeom prst="rect">
@@ -8492,9 +8303,9 @@
           <p:nvPr/>
         </p:nvCxnSpPr>
         <p:spPr>
-          <a:xfrm>
-            <a:off x="9303324" y="2204125"/>
-            <a:ext cx="556932" cy="608323"/>
+          <a:xfrm flipV="1">
+            <a:off x="9303324" y="1939740"/>
+            <a:ext cx="532181" cy="264385"/>
           </a:xfrm>
           <a:prstGeom prst="bentConnector3">
             <a:avLst>
@@ -8536,7 +8347,7 @@
         <p:spPr>
           <a:xfrm flipV="1">
             <a:off x="6977493" y="2196000"/>
-            <a:ext cx="562846" cy="1784126"/>
+            <a:ext cx="562846" cy="1771064"/>
           </a:xfrm>
           <a:prstGeom prst="bentConnector3">
             <a:avLst>
@@ -8574,7 +8385,7 @@
           <p:nvPr/>
         </p:nvPicPr>
         <p:blipFill>
-          <a:blip r:embed="rId8" cstate="screen">
+          <a:blip r:embed="rId7" cstate="screen">
             <a:extLst>
               <a:ext uri="{28A0092B-C50C-407E-A947-70E740481C1C}">
                 <a14:useLocalDpi xmlns:a14="http://schemas.microsoft.com/office/drawing/2010/main" val="0"/>
@@ -8627,7 +8438,7 @@
           <p:nvPr/>
         </p:nvPicPr>
         <p:blipFill>
-          <a:blip r:embed="rId25" cstate="screen">
+          <a:blip r:embed="rId24" cstate="screen">
             <a:extLst>
               <a:ext uri="{28A0092B-C50C-407E-A947-70E740481C1C}">
                 <a14:useLocalDpi xmlns:a14="http://schemas.microsoft.com/office/drawing/2010/main" val="0"/>
@@ -8683,8 +8494,8 @@
         </p:nvCxnSpPr>
         <p:spPr>
           <a:xfrm>
-            <a:off x="6977493" y="3980126"/>
-            <a:ext cx="550689" cy="1914874"/>
+            <a:off x="6977493" y="3967064"/>
+            <a:ext cx="550689" cy="1927936"/>
           </a:xfrm>
           <a:prstGeom prst="bentConnector3">
             <a:avLst>
@@ -8722,7 +8533,7 @@
           <p:nvPr/>
         </p:nvPicPr>
         <p:blipFill>
-          <a:blip r:embed="rId8" cstate="screen">
+          <a:blip r:embed="rId7" cstate="screen">
             <a:extLst>
               <a:ext uri="{28A0092B-C50C-407E-A947-70E740481C1C}">
                 <a14:useLocalDpi xmlns:a14="http://schemas.microsoft.com/office/drawing/2010/main" val="0"/>
@@ -8760,6 +8571,385 @@
           </a:extLst>
         </p:spPr>
       </p:pic>
+      <p:pic>
+        <p:nvPicPr>
+          <p:cNvPr id="12" name="Picture 2">
+            <a:extLst>
+              <a:ext uri="{FF2B5EF4-FFF2-40B4-BE49-F238E27FC236}">
+                <a16:creationId xmlns:a16="http://schemas.microsoft.com/office/drawing/2014/main" id="{6CE4CF82-A7C1-86C0-A003-B9F6BAFF661B}"/>
+              </a:ext>
+            </a:extLst>
+          </p:cNvPr>
+          <p:cNvPicPr>
+            <a:picLocks noChangeAspect="1" noChangeArrowheads="1"/>
+          </p:cNvPicPr>
+          <p:nvPr/>
+        </p:nvPicPr>
+        <p:blipFill>
+          <a:blip r:embed="rId23" cstate="screen">
+            <a:extLst>
+              <a:ext uri="{28A0092B-C50C-407E-A947-70E740481C1C}">
+                <a14:useLocalDpi xmlns:a14="http://schemas.microsoft.com/office/drawing/2010/main" val="0"/>
+              </a:ext>
+            </a:extLst>
+          </a:blip>
+          <a:srcRect/>
+          <a:stretch/>
+        </p:blipFill>
+        <p:spPr bwMode="auto">
+          <a:xfrm>
+            <a:off x="7533808" y="3160416"/>
+            <a:ext cx="540000" cy="540000"/>
+          </a:xfrm>
+          <a:prstGeom prst="rect">
+            <a:avLst/>
+          </a:prstGeom>
+          <a:noFill/>
+          <a:ln w="57150">
+            <a:solidFill>
+              <a:srgbClr val="00B0F0"/>
+            </a:solidFill>
+          </a:ln>
+          <a:effectLst>
+            <a:softEdge rad="25400"/>
+          </a:effectLst>
+          <a:extLst>
+            <a:ext uri="{909E8E84-426E-40DD-AFC4-6F175D3DCCD1}">
+              <a14:hiddenFill xmlns:a14="http://schemas.microsoft.com/office/drawing/2010/main">
+                <a:solidFill>
+                  <a:srgbClr val="FFFFFF"/>
+                </a:solidFill>
+              </a14:hiddenFill>
+            </a:ext>
+          </a:extLst>
+        </p:spPr>
+      </p:pic>
+      <p:grpSp>
+        <p:nvGrpSpPr>
+          <p:cNvPr id="36" name="Group 35">
+            <a:extLst>
+              <a:ext uri="{FF2B5EF4-FFF2-40B4-BE49-F238E27FC236}">
+                <a16:creationId xmlns:a16="http://schemas.microsoft.com/office/drawing/2014/main" id="{2C9A8AA2-1AF8-FFB4-3D83-F280285F32EB}"/>
+              </a:ext>
+            </a:extLst>
+          </p:cNvPr>
+          <p:cNvGrpSpPr/>
+          <p:nvPr/>
+        </p:nvGrpSpPr>
+        <p:grpSpPr>
+          <a:xfrm>
+            <a:off x="9835942" y="2651617"/>
+            <a:ext cx="1768899" cy="540000"/>
+            <a:chOff x="9835942" y="2836690"/>
+            <a:chExt cx="1768899" cy="540000"/>
+          </a:xfrm>
+        </p:grpSpPr>
+        <p:sp>
+          <p:nvSpPr>
+            <p:cNvPr id="29" name="Rectangle: Rounded Corners 28">
+              <a:extLst>
+                <a:ext uri="{FF2B5EF4-FFF2-40B4-BE49-F238E27FC236}">
+                  <a16:creationId xmlns:a16="http://schemas.microsoft.com/office/drawing/2014/main" id="{29F6D3BD-27D6-B6FD-1376-987A3ED8E834}"/>
+                </a:ext>
+              </a:extLst>
+            </p:cNvPr>
+            <p:cNvSpPr/>
+            <p:nvPr/>
+          </p:nvSpPr>
+          <p:spPr>
+            <a:xfrm>
+              <a:off x="10344841" y="2878909"/>
+              <a:ext cx="1260000" cy="450000"/>
+            </a:xfrm>
+            <a:prstGeom prst="roundRect">
+              <a:avLst/>
+            </a:prstGeom>
+            <a:solidFill>
+              <a:schemeClr val="bg1"/>
+            </a:solidFill>
+            <a:ln>
+              <a:noFill/>
+            </a:ln>
+          </p:spPr>
+          <p:style>
+            <a:lnRef idx="2">
+              <a:schemeClr val="accent1">
+                <a:shade val="15000"/>
+              </a:schemeClr>
+            </a:lnRef>
+            <a:fillRef idx="1">
+              <a:schemeClr val="accent1"/>
+            </a:fillRef>
+            <a:effectRef idx="0">
+              <a:schemeClr val="accent1"/>
+            </a:effectRef>
+            <a:fontRef idx="minor">
+              <a:schemeClr val="lt1"/>
+            </a:fontRef>
+          </p:style>
+          <p:txBody>
+            <a:bodyPr rtlCol="0" anchor="ctr"/>
+            <a:lstStyle/>
+            <a:p>
+              <a:r>
+                <a:rPr lang="en-GB" sz="900" dirty="0">
+                  <a:solidFill>
+                    <a:schemeClr val="tx1"/>
+                  </a:solidFill>
+                </a:rPr>
+                <a:t> </a:t>
+              </a:r>
+              <a:r>
+                <a:rPr lang="en-GB" sz="900" dirty="0" err="1">
+                  <a:solidFill>
+                    <a:schemeClr val="tx1"/>
+                  </a:solidFill>
+                </a:rPr>
+                <a:t>Kaltos</a:t>
+              </a:r>
+              <a:r>
+                <a:rPr lang="en-GB" sz="900" dirty="0">
+                  <a:solidFill>
+                    <a:schemeClr val="tx1"/>
+                  </a:solidFill>
+                </a:rPr>
+                <a:t> Constantine</a:t>
+              </a:r>
+            </a:p>
+            <a:p>
+              <a:r>
+                <a:rPr lang="en-GB" sz="800" dirty="0">
+                  <a:solidFill>
+                    <a:schemeClr val="tx1"/>
+                  </a:solidFill>
+                </a:rPr>
+                <a:t> Classiness 2IC</a:t>
+              </a:r>
+              <a:endParaRPr lang="en-GB" sz="600" dirty="0">
+                <a:solidFill>
+                  <a:schemeClr val="tx1"/>
+                </a:solidFill>
+              </a:endParaRPr>
+            </a:p>
+          </p:txBody>
+        </p:sp>
+        <p:pic>
+          <p:nvPicPr>
+            <p:cNvPr id="30" name="Picture 2">
+              <a:extLst>
+                <a:ext uri="{FF2B5EF4-FFF2-40B4-BE49-F238E27FC236}">
+                  <a16:creationId xmlns:a16="http://schemas.microsoft.com/office/drawing/2014/main" id="{DAFC9EAA-B517-1115-B019-80F3C37DAF74}"/>
+                </a:ext>
+              </a:extLst>
+            </p:cNvPr>
+            <p:cNvPicPr>
+              <a:picLocks noChangeAspect="1" noChangeArrowheads="1"/>
+            </p:cNvPicPr>
+            <p:nvPr/>
+          </p:nvPicPr>
+          <p:blipFill>
+            <a:blip r:embed="rId25" cstate="screen">
+              <a:extLst>
+                <a:ext uri="{28A0092B-C50C-407E-A947-70E740481C1C}">
+                  <a14:useLocalDpi xmlns:a14="http://schemas.microsoft.com/office/drawing/2010/main" val="0"/>
+                </a:ext>
+              </a:extLst>
+            </a:blip>
+            <a:srcRect/>
+            <a:stretch/>
+          </p:blipFill>
+          <p:spPr bwMode="auto">
+            <a:xfrm>
+              <a:off x="9835942" y="2836690"/>
+              <a:ext cx="540000" cy="540000"/>
+            </a:xfrm>
+            <a:prstGeom prst="rect">
+              <a:avLst/>
+            </a:prstGeom>
+            <a:noFill/>
+            <a:ln w="57150">
+              <a:solidFill>
+                <a:srgbClr val="00B0F0"/>
+              </a:solidFill>
+            </a:ln>
+            <a:effectLst>
+              <a:softEdge rad="25400"/>
+            </a:effectLst>
+            <a:extLst>
+              <a:ext uri="{909E8E84-426E-40DD-AFC4-6F175D3DCCD1}">
+                <a14:hiddenFill xmlns:a14="http://schemas.microsoft.com/office/drawing/2010/main">
+                  <a:solidFill>
+                    <a:srgbClr val="FFFFFF"/>
+                  </a:solidFill>
+                </a14:hiddenFill>
+              </a:ext>
+            </a:extLst>
+          </p:spPr>
+        </p:pic>
+      </p:grpSp>
+      <p:grpSp>
+        <p:nvGrpSpPr>
+          <p:cNvPr id="45" name="Group 44">
+            <a:extLst>
+              <a:ext uri="{FF2B5EF4-FFF2-40B4-BE49-F238E27FC236}">
+                <a16:creationId xmlns:a16="http://schemas.microsoft.com/office/drawing/2014/main" id="{DB12CA5E-CF0D-0AB9-A7CE-FEBBB5158EA8}"/>
+              </a:ext>
+            </a:extLst>
+          </p:cNvPr>
+          <p:cNvGrpSpPr/>
+          <p:nvPr/>
+        </p:nvGrpSpPr>
+        <p:grpSpPr>
+          <a:xfrm>
+            <a:off x="2866496" y="2615160"/>
+            <a:ext cx="1769516" cy="540000"/>
+            <a:chOff x="2866496" y="2615160"/>
+            <a:chExt cx="1769516" cy="540000"/>
+          </a:xfrm>
+        </p:grpSpPr>
+        <p:sp>
+          <p:nvSpPr>
+            <p:cNvPr id="1099" name="Rectangle: Rounded Corners 1098">
+              <a:extLst>
+                <a:ext uri="{FF2B5EF4-FFF2-40B4-BE49-F238E27FC236}">
+                  <a16:creationId xmlns:a16="http://schemas.microsoft.com/office/drawing/2014/main" id="{34FCAC61-F5D9-B379-C798-C02018F1CD6A}"/>
+                </a:ext>
+              </a:extLst>
+            </p:cNvPr>
+            <p:cNvSpPr/>
+            <p:nvPr/>
+          </p:nvSpPr>
+          <p:spPr>
+            <a:xfrm>
+              <a:off x="3376012" y="2668285"/>
+              <a:ext cx="1260000" cy="450000"/>
+            </a:xfrm>
+            <a:prstGeom prst="roundRect">
+              <a:avLst/>
+            </a:prstGeom>
+            <a:solidFill>
+              <a:schemeClr val="bg1"/>
+            </a:solidFill>
+            <a:ln>
+              <a:noFill/>
+            </a:ln>
+          </p:spPr>
+          <p:style>
+            <a:lnRef idx="2">
+              <a:schemeClr val="accent1">
+                <a:shade val="15000"/>
+              </a:schemeClr>
+            </a:lnRef>
+            <a:fillRef idx="1">
+              <a:schemeClr val="accent1"/>
+            </a:fillRef>
+            <a:effectRef idx="0">
+              <a:schemeClr val="accent1"/>
+            </a:effectRef>
+            <a:fontRef idx="minor">
+              <a:schemeClr val="lt1"/>
+            </a:fontRef>
+          </p:style>
+          <p:txBody>
+            <a:bodyPr rtlCol="0" anchor="ctr"/>
+            <a:lstStyle/>
+            <a:p>
+              <a:r>
+                <a:rPr lang="en-GB" sz="900" dirty="0">
+                  <a:solidFill>
+                    <a:schemeClr val="tx1"/>
+                  </a:solidFill>
+                </a:rPr>
+                <a:t> </a:t>
+              </a:r>
+              <a:r>
+                <a:rPr lang="en-GB" sz="900" dirty="0" err="1">
+                  <a:solidFill>
+                    <a:schemeClr val="tx1"/>
+                  </a:solidFill>
+                </a:rPr>
+                <a:t>tbd</a:t>
+              </a:r>
+              <a:endParaRPr lang="en-GB" sz="900" dirty="0">
+                <a:solidFill>
+                  <a:schemeClr val="tx1"/>
+                </a:solidFill>
+              </a:endParaRPr>
+            </a:p>
+            <a:p>
+              <a:r>
+                <a:rPr lang="en-GB" sz="900" dirty="0">
+                  <a:solidFill>
+                    <a:schemeClr val="tx1"/>
+                  </a:solidFill>
+                </a:rPr>
+                <a:t> </a:t>
+              </a:r>
+              <a:r>
+                <a:rPr lang="en-GB" sz="800" dirty="0">
+                  <a:solidFill>
+                    <a:schemeClr val="tx1"/>
+                  </a:solidFill>
+                </a:rPr>
+                <a:t>Infrastructure Director</a:t>
+              </a:r>
+            </a:p>
+          </p:txBody>
+        </p:sp>
+        <p:pic>
+          <p:nvPicPr>
+            <p:cNvPr id="44" name="Picture 2">
+              <a:extLst>
+                <a:ext uri="{FF2B5EF4-FFF2-40B4-BE49-F238E27FC236}">
+                  <a16:creationId xmlns:a16="http://schemas.microsoft.com/office/drawing/2014/main" id="{5BD13804-2FF7-D9EC-D259-30C910E23ABC}"/>
+                </a:ext>
+              </a:extLst>
+            </p:cNvPr>
+            <p:cNvPicPr>
+              <a:picLocks noChangeAspect="1" noChangeArrowheads="1"/>
+            </p:cNvPicPr>
+            <p:nvPr/>
+          </p:nvPicPr>
+          <p:blipFill>
+            <a:blip r:embed="rId7" cstate="screen">
+              <a:extLst>
+                <a:ext uri="{28A0092B-C50C-407E-A947-70E740481C1C}">
+                  <a14:useLocalDpi xmlns:a14="http://schemas.microsoft.com/office/drawing/2010/main" val="0"/>
+                </a:ext>
+              </a:extLst>
+            </a:blip>
+            <a:srcRect/>
+            <a:stretch/>
+          </p:blipFill>
+          <p:spPr bwMode="auto">
+            <a:xfrm>
+              <a:off x="2866496" y="2615160"/>
+              <a:ext cx="540000" cy="540000"/>
+            </a:xfrm>
+            <a:prstGeom prst="rect">
+              <a:avLst/>
+            </a:prstGeom>
+            <a:noFill/>
+            <a:ln w="57150">
+              <a:solidFill>
+                <a:srgbClr val="00B0F0"/>
+              </a:solidFill>
+            </a:ln>
+            <a:effectLst>
+              <a:softEdge rad="25400"/>
+            </a:effectLst>
+            <a:extLst>
+              <a:ext uri="{909E8E84-426E-40DD-AFC4-6F175D3DCCD1}">
+                <a14:hiddenFill xmlns:a14="http://schemas.microsoft.com/office/drawing/2010/main">
+                  <a:solidFill>
+                    <a:srgbClr val="FFFFFF"/>
+                  </a:solidFill>
+                </a14:hiddenFill>
+              </a:ext>
+            </a:extLst>
+          </p:spPr>
+        </p:pic>
+      </p:grpSp>
     </p:spTree>
     <p:extLst>
       <p:ext uri="{BB962C8B-B14F-4D97-AF65-F5344CB8AC3E}">
